--- a/0H01002_網干風駕_個人製作.pptx
+++ b/0H01002_網干風駕_個人製作.pptx
@@ -3077,8 +3077,8 @@
         </p:nvSpPr>
         <p:spPr>
           <a:xfrm>
-            <a:off x="2292021" y="4187952"/>
-            <a:ext cx="7328229" cy="2157984"/>
+            <a:off x="2301165" y="5001768"/>
+            <a:ext cx="7328229" cy="1426464"/>
           </a:xfrm>
           <a:prstGeom prst="roundRect">
             <a:avLst>
@@ -3258,8 +3258,8 @@
         </p:nvSpPr>
         <p:spPr>
           <a:xfrm>
-            <a:off x="3050319" y="5049189"/>
-            <a:ext cx="6569931" cy="627712"/>
+            <a:off x="3068607" y="5478957"/>
+            <a:ext cx="5855937" cy="627712"/>
           </a:xfrm>
           <a:prstGeom prst="rect">
             <a:avLst/>
@@ -3356,7 +3356,7 @@
         </p:blipFill>
         <p:spPr>
           <a:xfrm>
-            <a:off x="6904862" y="2328290"/>
+            <a:off x="3878198" y="3023626"/>
             <a:ext cx="4054221" cy="1197361"/>
           </a:xfrm>
           <a:prstGeom prst="rect">
@@ -3378,7 +3378,7 @@
         </p:nvSpPr>
         <p:spPr>
           <a:xfrm>
-            <a:off x="375002" y="2558308"/>
+            <a:off x="2999330" y="1954804"/>
             <a:ext cx="6253635" cy="707886"/>
           </a:xfrm>
           <a:prstGeom prst="rect">
@@ -3427,7 +3427,7 @@
         </p:nvSpPr>
         <p:spPr>
           <a:xfrm>
-            <a:off x="7284720" y="3380328"/>
+            <a:off x="4258056" y="4075664"/>
             <a:ext cx="3313728" cy="523220"/>
           </a:xfrm>
           <a:prstGeom prst="rect">
@@ -4083,17 +4083,47 @@
           <a:bodyPr anchor="ctr"/>
           <a:lstStyle/>
           <a:p>
-            <a:pPr algn="r"/>
+            <a:pPr algn="ctr"/>
             <a:r>
               <a:rPr lang="ja-JP" altLang="en-US" sz="3200" dirty="0">
                 <a:latin typeface="BIZ UDPゴシック" panose="020B0400000000000000" pitchFamily="50" charset="-128"/>
                 <a:ea typeface="BIZ UDPゴシック" panose="020B0400000000000000" pitchFamily="50" charset="-128"/>
               </a:rPr>
-              <a:t>ブラウザで利用可能</a:t>
-            </a:r>
-          </a:p>
-        </p:txBody>
-      </p:sp>
+              <a:t>     ブラウザで利用可能</a:t>
+            </a:r>
+          </a:p>
+        </p:txBody>
+      </p:sp>
+      <p:pic>
+        <p:nvPicPr>
+          <p:cNvPr id="32" name="図 31" descr="緑のチェックマークのイラスト無料">
+            <a:extLst>
+              <a:ext uri="{FF2B5EF4-FFF2-40B4-BE49-F238E27FC236}">
+                <a16:creationId xmlns:a16="http://schemas.microsoft.com/office/drawing/2014/main" id="{A4F8B316-76DD-949C-EFF4-D53254922599}"/>
+              </a:ext>
+            </a:extLst>
+          </p:cNvPr>
+          <p:cNvPicPr>
+            <a:picLocks noChangeAspect="1"/>
+          </p:cNvPicPr>
+          <p:nvPr/>
+        </p:nvPicPr>
+        <p:blipFill>
+          <a:blip r:embed="rId3"/>
+          <a:stretch>
+            <a:fillRect/>
+          </a:stretch>
+        </p:blipFill>
+        <p:spPr>
+          <a:xfrm>
+            <a:off x="6719887" y="2128837"/>
+            <a:ext cx="881063" cy="881063"/>
+          </a:xfrm>
+          <a:prstGeom prst="rect">
+            <a:avLst/>
+          </a:prstGeom>
+        </p:spPr>
+      </p:pic>
       <p:sp>
         <p:nvSpPr>
           <p:cNvPr id="24" name="Shape 4">
@@ -4238,36 +4268,6 @@
           </a:prstGeom>
         </p:spPr>
       </p:pic>
-      <p:pic>
-        <p:nvPicPr>
-          <p:cNvPr id="32" name="図 31" descr="緑のチェックマークのイラスト無料">
-            <a:extLst>
-              <a:ext uri="{FF2B5EF4-FFF2-40B4-BE49-F238E27FC236}">
-                <a16:creationId xmlns:a16="http://schemas.microsoft.com/office/drawing/2014/main" id="{A4F8B316-76DD-949C-EFF4-D53254922599}"/>
-              </a:ext>
-            </a:extLst>
-          </p:cNvPr>
-          <p:cNvPicPr>
-            <a:picLocks noChangeAspect="1"/>
-          </p:cNvPicPr>
-          <p:nvPr/>
-        </p:nvPicPr>
-        <p:blipFill>
-          <a:blip r:embed="rId3"/>
-          <a:stretch>
-            <a:fillRect/>
-          </a:stretch>
-        </p:blipFill>
-        <p:spPr>
-          <a:xfrm>
-            <a:off x="6719887" y="2128837"/>
-            <a:ext cx="881063" cy="881063"/>
-          </a:xfrm>
-          <a:prstGeom prst="rect">
-            <a:avLst/>
-          </a:prstGeom>
-        </p:spPr>
-      </p:pic>
       <p:sp>
         <p:nvSpPr>
           <p:cNvPr id="34" name="Shape 4">
@@ -4402,13 +4402,13 @@
           <a:bodyPr anchor="ctr"/>
           <a:lstStyle/>
           <a:p>
-            <a:pPr algn="r"/>
+            <a:pPr algn="ctr"/>
             <a:r>
               <a:rPr lang="en-US" altLang="ja-JP" sz="3200" dirty="0">
                 <a:latin typeface="BIZ UDPゴシック" panose="020B0400000000000000" pitchFamily="50" charset="-128"/>
                 <a:ea typeface="BIZ UDPゴシック" panose="020B0400000000000000" pitchFamily="50" charset="-128"/>
               </a:rPr>
-              <a:t>URL</a:t>
+              <a:t>   URL</a:t>
             </a:r>
             <a:r>
               <a:rPr lang="ja-JP" altLang="en-US" sz="3200" dirty="0">
@@ -4442,7 +4442,7 @@
         </p:blipFill>
         <p:spPr>
           <a:xfrm>
-            <a:off x="6653211" y="5634037"/>
+            <a:off x="6698931" y="5634037"/>
             <a:ext cx="881063" cy="881063"/>
           </a:xfrm>
           <a:prstGeom prst="rect">
@@ -4483,6 +4483,147 @@
           <a:chExt cx="0" cy="0"/>
         </a:xfrm>
       </p:grpSpPr>
+      <p:sp>
+        <p:nvSpPr>
+          <p:cNvPr id="14" name="Shape 4">
+            <a:extLst>
+              <a:ext uri="{FF2B5EF4-FFF2-40B4-BE49-F238E27FC236}">
+                <a16:creationId xmlns:a16="http://schemas.microsoft.com/office/drawing/2014/main" id="{2954698B-A1B0-4C70-270A-09F5FF568893}"/>
+              </a:ext>
+            </a:extLst>
+          </p:cNvPr>
+          <p:cNvSpPr/>
+          <p:nvPr/>
+        </p:nvSpPr>
+        <p:spPr>
+          <a:xfrm>
+            <a:off x="853058" y="4054184"/>
+            <a:ext cx="2578226" cy="2343549"/>
+          </a:xfrm>
+          <a:prstGeom prst="roundRect">
+            <a:avLst>
+              <a:gd name="adj" fmla="val 2254"/>
+            </a:avLst>
+          </a:prstGeom>
+          <a:solidFill>
+            <a:srgbClr val="FFFFFF"/>
+          </a:solidFill>
+          <a:ln w="12700">
+            <a:solidFill>
+              <a:srgbClr val="E1E8F0"/>
+            </a:solidFill>
+            <a:prstDash val="solid"/>
+          </a:ln>
+          <a:effectLst>
+            <a:outerShdw blurRad="12700" dist="50800" dir="2700000" algn="bl" rotWithShape="0">
+              <a:srgbClr val="000000">
+                <a:alpha val="8000"/>
+              </a:srgbClr>
+            </a:outerShdw>
+          </a:effectLst>
+        </p:spPr>
+        <p:txBody>
+          <a:bodyPr/>
+          <a:lstStyle/>
+          <a:p>
+            <a:endParaRPr lang="ja-JP" altLang="en-US" dirty="0"/>
+          </a:p>
+        </p:txBody>
+      </p:sp>
+      <p:sp>
+        <p:nvSpPr>
+          <p:cNvPr id="10" name="Shape 4">
+            <a:extLst>
+              <a:ext uri="{FF2B5EF4-FFF2-40B4-BE49-F238E27FC236}">
+                <a16:creationId xmlns:a16="http://schemas.microsoft.com/office/drawing/2014/main" id="{AF7CC256-A18B-3A36-17E0-9DD181E45E8D}"/>
+              </a:ext>
+            </a:extLst>
+          </p:cNvPr>
+          <p:cNvSpPr/>
+          <p:nvPr/>
+        </p:nvSpPr>
+        <p:spPr>
+          <a:xfrm>
+            <a:off x="8599669" y="4045302"/>
+            <a:ext cx="2578226" cy="2343549"/>
+          </a:xfrm>
+          <a:prstGeom prst="roundRect">
+            <a:avLst>
+              <a:gd name="adj" fmla="val 2254"/>
+            </a:avLst>
+          </a:prstGeom>
+          <a:solidFill>
+            <a:srgbClr val="FFFFFF"/>
+          </a:solidFill>
+          <a:ln w="12700">
+            <a:solidFill>
+              <a:srgbClr val="E1E8F0"/>
+            </a:solidFill>
+            <a:prstDash val="solid"/>
+          </a:ln>
+          <a:effectLst>
+            <a:outerShdw blurRad="12700" dist="50800" dir="2700000" algn="bl" rotWithShape="0">
+              <a:srgbClr val="000000">
+                <a:alpha val="8000"/>
+              </a:srgbClr>
+            </a:outerShdw>
+          </a:effectLst>
+        </p:spPr>
+        <p:txBody>
+          <a:bodyPr/>
+          <a:lstStyle/>
+          <a:p>
+            <a:endParaRPr lang="ja-JP" altLang="en-US" dirty="0"/>
+          </a:p>
+        </p:txBody>
+      </p:sp>
+      <p:sp>
+        <p:nvSpPr>
+          <p:cNvPr id="6" name="Shape 4">
+            <a:extLst>
+              <a:ext uri="{FF2B5EF4-FFF2-40B4-BE49-F238E27FC236}">
+                <a16:creationId xmlns:a16="http://schemas.microsoft.com/office/drawing/2014/main" id="{597E7D0D-828C-05EE-574C-DC67233EA839}"/>
+              </a:ext>
+            </a:extLst>
+          </p:cNvPr>
+          <p:cNvSpPr/>
+          <p:nvPr/>
+        </p:nvSpPr>
+        <p:spPr>
+          <a:xfrm>
+            <a:off x="4737667" y="4042784"/>
+            <a:ext cx="2578226" cy="2343549"/>
+          </a:xfrm>
+          <a:prstGeom prst="roundRect">
+            <a:avLst>
+              <a:gd name="adj" fmla="val 2254"/>
+            </a:avLst>
+          </a:prstGeom>
+          <a:solidFill>
+            <a:srgbClr val="FFFFFF"/>
+          </a:solidFill>
+          <a:ln w="12700">
+            <a:solidFill>
+              <a:srgbClr val="E1E8F0"/>
+            </a:solidFill>
+            <a:prstDash val="solid"/>
+          </a:ln>
+          <a:effectLst>
+            <a:outerShdw blurRad="12700" dist="50800" dir="2700000" algn="bl" rotWithShape="0">
+              <a:srgbClr val="000000">
+                <a:alpha val="8000"/>
+              </a:srgbClr>
+            </a:outerShdw>
+          </a:effectLst>
+        </p:spPr>
+        <p:txBody>
+          <a:bodyPr/>
+          <a:lstStyle/>
+          <a:p>
+            <a:endParaRPr lang="ja-JP" altLang="en-US" dirty="0"/>
+          </a:p>
+        </p:txBody>
+      </p:sp>
       <p:pic>
         <p:nvPicPr>
           <p:cNvPr id="12" name="図 11">
@@ -4505,8 +4646,8 @@
         </p:blipFill>
         <p:spPr>
           <a:xfrm>
-            <a:off x="6119717" y="1415054"/>
-            <a:ext cx="7265040" cy="4086585"/>
+            <a:off x="3220972" y="3887336"/>
+            <a:ext cx="5644860" cy="3175234"/>
           </a:xfrm>
           <a:prstGeom prst="rect">
             <a:avLst/>
@@ -4623,7 +4764,7 @@
                 <a:ea typeface="BIZ UDPゴシック" panose="020B0400000000000000" pitchFamily="50" charset="-128"/>
                 <a:cs typeface="Yu Gothic" pitchFamily="34" charset="-120"/>
               </a:rPr>
-              <a:t>開 発 環 境 ・ 開 発 技 術</a:t>
+              <a:t>開 発 技 術</a:t>
             </a:r>
             <a:endParaRPr lang="en-US" sz="4800" dirty="0">
               <a:solidFill>
@@ -4693,8 +4834,8 @@
         </p:blipFill>
         <p:spPr>
           <a:xfrm>
-            <a:off x="502919" y="5047489"/>
-            <a:ext cx="1617949" cy="1617949"/>
+            <a:off x="735060" y="1731948"/>
+            <a:ext cx="1699088" cy="1699088"/>
           </a:xfrm>
           <a:prstGeom prst="rect">
             <a:avLst/>
@@ -4723,8 +4864,8 @@
         </p:blipFill>
         <p:spPr>
           <a:xfrm>
-            <a:off x="3000946" y="5033184"/>
-            <a:ext cx="1203320" cy="1699088"/>
+            <a:off x="3178326" y="1731948"/>
+            <a:ext cx="1238226" cy="1699088"/>
           </a:xfrm>
           <a:prstGeom prst="rect">
             <a:avLst/>
@@ -4753,8 +4894,8 @@
         </p:blipFill>
         <p:spPr>
           <a:xfrm>
-            <a:off x="5036643" y="5047489"/>
-            <a:ext cx="1590900" cy="1686685"/>
+            <a:off x="5094878" y="1731948"/>
+            <a:ext cx="1726546" cy="1699088"/>
           </a:xfrm>
           <a:prstGeom prst="rect">
             <a:avLst/>
@@ -4783,8 +4924,8 @@
         </p:blipFill>
         <p:spPr>
           <a:xfrm>
-            <a:off x="804766" y="2338578"/>
-            <a:ext cx="2635915" cy="2285919"/>
+            <a:off x="1384305" y="4892634"/>
+            <a:ext cx="1514343" cy="1313269"/>
           </a:xfrm>
           <a:prstGeom prst="rect">
             <a:avLst/>
@@ -4805,8 +4946,8 @@
         </p:nvSpPr>
         <p:spPr>
           <a:xfrm>
-            <a:off x="1195293" y="1686215"/>
-            <a:ext cx="1818240" cy="701512"/>
+            <a:off x="1409071" y="4249298"/>
+            <a:ext cx="1615476" cy="533870"/>
           </a:xfrm>
           <a:prstGeom prst="rect">
             <a:avLst/>
@@ -4822,7 +4963,7 @@
               <a:buNone/>
             </a:pPr>
             <a:r>
-              <a:rPr lang="en-US" sz="3200" dirty="0">
+              <a:rPr lang="en-US" sz="2800" dirty="0">
                 <a:solidFill>
                   <a:srgbClr val="243447"/>
                 </a:solidFill>
@@ -4855,8 +4996,8 @@
         </p:blipFill>
         <p:spPr>
           <a:xfrm>
-            <a:off x="4852891" y="2338578"/>
-            <a:ext cx="2635915" cy="2314575"/>
+            <a:off x="9080374" y="4810600"/>
+            <a:ext cx="1714256" cy="1505274"/>
           </a:xfrm>
           <a:prstGeom prst="rect">
             <a:avLst/>
@@ -4877,7 +5018,7 @@
         </p:nvSpPr>
         <p:spPr>
           <a:xfrm>
-            <a:off x="5005293" y="1664780"/>
+            <a:off x="8964665" y="4155030"/>
             <a:ext cx="2157650" cy="701512"/>
           </a:xfrm>
           <a:prstGeom prst="rect">
@@ -4894,7 +5035,7 @@
               <a:buNone/>
             </a:pPr>
             <a:r>
-              <a:rPr lang="en-US" sz="3200" dirty="0">
+              <a:rPr lang="en-US" sz="2800" dirty="0">
                 <a:solidFill>
                   <a:srgbClr val="243447"/>
                 </a:solidFill>
@@ -4919,7 +5060,7 @@
         </p:nvSpPr>
         <p:spPr>
           <a:xfrm>
-            <a:off x="9215200" y="1637066"/>
+            <a:off x="5549531" y="4031354"/>
             <a:ext cx="1167050" cy="701512"/>
           </a:xfrm>
           <a:prstGeom prst="rect">
@@ -4936,7 +5077,7 @@
               <a:buNone/>
             </a:pPr>
             <a:r>
-              <a:rPr lang="en-US" sz="3200" dirty="0">
+              <a:rPr lang="en-US" sz="2800" dirty="0">
                 <a:solidFill>
                   <a:srgbClr val="243447"/>
                 </a:solidFill>
@@ -4969,14 +5110,122 @@
         </p:blipFill>
         <p:spPr>
           <a:xfrm>
-            <a:off x="7924800" y="6025603"/>
-            <a:ext cx="3843100" cy="708571"/>
+            <a:off x="8865832" y="1731948"/>
+            <a:ext cx="2991398" cy="551539"/>
           </a:xfrm>
           <a:prstGeom prst="rect">
             <a:avLst/>
           </a:prstGeom>
         </p:spPr>
       </p:pic>
+      <p:sp>
+        <p:nvSpPr>
+          <p:cNvPr id="18" name="減算記号 17">
+            <a:extLst>
+              <a:ext uri="{FF2B5EF4-FFF2-40B4-BE49-F238E27FC236}">
+                <a16:creationId xmlns:a16="http://schemas.microsoft.com/office/drawing/2014/main" id="{E68C4BDA-3655-5D47-6DDE-4391B5275F0D}"/>
+              </a:ext>
+            </a:extLst>
+          </p:cNvPr>
+          <p:cNvSpPr/>
+          <p:nvPr/>
+        </p:nvSpPr>
+        <p:spPr>
+          <a:xfrm>
+            <a:off x="3502151" y="4787730"/>
+            <a:ext cx="1235515" cy="914400"/>
+          </a:xfrm>
+          <a:prstGeom prst="mathMinus">
+            <a:avLst/>
+          </a:prstGeom>
+          <a:solidFill>
+            <a:schemeClr val="bg2">
+              <a:lumMod val="50000"/>
+            </a:schemeClr>
+          </a:solidFill>
+          <a:ln>
+            <a:noFill/>
+          </a:ln>
+        </p:spPr>
+        <p:style>
+          <a:lnRef idx="2">
+            <a:schemeClr val="accent1">
+              <a:shade val="15000"/>
+            </a:schemeClr>
+          </a:lnRef>
+          <a:fillRef idx="1">
+            <a:schemeClr val="accent1"/>
+          </a:fillRef>
+          <a:effectRef idx="0">
+            <a:schemeClr val="accent1"/>
+          </a:effectRef>
+          <a:fontRef idx="minor">
+            <a:schemeClr val="lt1"/>
+          </a:fontRef>
+        </p:style>
+        <p:txBody>
+          <a:bodyPr rtlCol="0" anchor="ctr"/>
+          <a:lstStyle/>
+          <a:p>
+            <a:pPr algn="ctr"/>
+            <a:endParaRPr kumimoji="1" lang="ja-JP" altLang="en-US"/>
+          </a:p>
+        </p:txBody>
+      </p:sp>
+      <p:sp>
+        <p:nvSpPr>
+          <p:cNvPr id="23" name="減算記号 22">
+            <a:extLst>
+              <a:ext uri="{FF2B5EF4-FFF2-40B4-BE49-F238E27FC236}">
+                <a16:creationId xmlns:a16="http://schemas.microsoft.com/office/drawing/2014/main" id="{85925240-3D06-21E0-6BB6-ED5B5BCC110C}"/>
+              </a:ext>
+            </a:extLst>
+          </p:cNvPr>
+          <p:cNvSpPr/>
+          <p:nvPr/>
+        </p:nvSpPr>
+        <p:spPr>
+          <a:xfrm>
+            <a:off x="7364154" y="4783168"/>
+            <a:ext cx="1235515" cy="914400"/>
+          </a:xfrm>
+          <a:prstGeom prst="mathMinus">
+            <a:avLst/>
+          </a:prstGeom>
+          <a:solidFill>
+            <a:schemeClr val="bg2">
+              <a:lumMod val="50000"/>
+            </a:schemeClr>
+          </a:solidFill>
+          <a:ln>
+            <a:noFill/>
+          </a:ln>
+        </p:spPr>
+        <p:style>
+          <a:lnRef idx="2">
+            <a:schemeClr val="accent1">
+              <a:shade val="15000"/>
+            </a:schemeClr>
+          </a:lnRef>
+          <a:fillRef idx="1">
+            <a:schemeClr val="accent1"/>
+          </a:fillRef>
+          <a:effectRef idx="0">
+            <a:schemeClr val="accent1"/>
+          </a:effectRef>
+          <a:fontRef idx="minor">
+            <a:schemeClr val="lt1"/>
+          </a:fontRef>
+        </p:style>
+        <p:txBody>
+          <a:bodyPr rtlCol="0" anchor="ctr"/>
+          <a:lstStyle/>
+          <a:p>
+            <a:pPr algn="ctr"/>
+            <a:endParaRPr kumimoji="1" lang="ja-JP" altLang="en-US"/>
+          </a:p>
+        </p:txBody>
+      </p:sp>
     </p:spTree>
   </p:cSld>
   <p:clrMapOvr>
@@ -5182,8 +5431,8 @@
         </p:nvSpPr>
         <p:spPr>
           <a:xfrm>
-            <a:off x="345948" y="2749997"/>
-            <a:ext cx="5149977" cy="1938992"/>
+            <a:off x="345949" y="2749997"/>
+            <a:ext cx="4390644" cy="1938992"/>
           </a:xfrm>
           <a:prstGeom prst="rect">
             <a:avLst/>
@@ -5265,8 +5514,8 @@
         </p:blipFill>
         <p:spPr>
           <a:xfrm>
-            <a:off x="5176837" y="2400300"/>
-            <a:ext cx="6634163" cy="3392529"/>
+            <a:off x="4832413" y="2281428"/>
+            <a:ext cx="7107812" cy="3634740"/>
           </a:xfrm>
           <a:prstGeom prst="rect">
             <a:avLst/>
@@ -5287,7 +5536,7 @@
         </p:nvSpPr>
         <p:spPr>
           <a:xfrm>
-            <a:off x="7108698" y="6055172"/>
+            <a:off x="6880098" y="6027740"/>
             <a:ext cx="3035427" cy="523220"/>
           </a:xfrm>
           <a:prstGeom prst="rect">
@@ -5362,7 +5611,7 @@
         </p:nvSpPr>
         <p:spPr>
           <a:xfrm>
-            <a:off x="6622563" y="1963275"/>
+            <a:off x="934995" y="1981200"/>
             <a:ext cx="3425951" cy="2932575"/>
           </a:xfrm>
           <a:prstGeom prst="roundRect">
@@ -5952,7 +6201,7 @@
         </p:blipFill>
         <p:spPr>
           <a:xfrm>
-            <a:off x="6933839" y="1981200"/>
+            <a:off x="1246271" y="1999125"/>
             <a:ext cx="2914650" cy="2914650"/>
           </a:xfrm>
           <a:prstGeom prst="rect">
@@ -5960,36 +6209,58 @@
           </a:prstGeom>
         </p:spPr>
       </p:pic>
-      <p:pic>
-        <p:nvPicPr>
-          <p:cNvPr id="17" name="図 16">
-            <a:extLst>
-              <a:ext uri="{FF2B5EF4-FFF2-40B4-BE49-F238E27FC236}">
-                <a16:creationId xmlns:a16="http://schemas.microsoft.com/office/drawing/2014/main" id="{357A08C0-F8E8-2382-75C5-10D4953FA53C}"/>
-              </a:ext>
-            </a:extLst>
-          </p:cNvPr>
-          <p:cNvPicPr>
-            <a:picLocks noChangeAspect="1"/>
-          </p:cNvPicPr>
-          <p:nvPr/>
-        </p:nvPicPr>
-        <p:blipFill>
-          <a:blip r:embed="rId4"/>
-          <a:stretch>
-            <a:fillRect/>
-          </a:stretch>
-        </p:blipFill>
-        <p:spPr>
-          <a:xfrm>
-            <a:off x="1208912" y="2926970"/>
-            <a:ext cx="4054221" cy="1197361"/>
+      <p:sp>
+        <p:nvSpPr>
+          <p:cNvPr id="2" name="テキスト ボックス 1">
+            <a:extLst>
+              <a:ext uri="{FF2B5EF4-FFF2-40B4-BE49-F238E27FC236}">
+                <a16:creationId xmlns:a16="http://schemas.microsoft.com/office/drawing/2014/main" id="{057525B0-104A-1686-D1A2-EFF6D02AE521}"/>
+              </a:ext>
+            </a:extLst>
+          </p:cNvPr>
+          <p:cNvSpPr txBox="1"/>
+          <p:nvPr/>
+        </p:nvSpPr>
+        <p:spPr>
+          <a:xfrm>
+            <a:off x="5148072" y="3098928"/>
+            <a:ext cx="6775704" cy="584775"/>
           </a:xfrm>
           <a:prstGeom prst="rect">
             <a:avLst/>
           </a:prstGeom>
-        </p:spPr>
-      </p:pic>
+          <a:noFill/>
+        </p:spPr>
+        <p:txBody>
+          <a:bodyPr wrap="square" rtlCol="0">
+            <a:spAutoFit/>
+          </a:bodyPr>
+          <a:lstStyle/>
+          <a:p>
+            <a:r>
+              <a:rPr kumimoji="1" lang="ja-JP" altLang="en-US" sz="3200" dirty="0">
+                <a:latin typeface="BIZ UDPゴシック" panose="020B0400000000000000" pitchFamily="50" charset="-128"/>
+                <a:ea typeface="BIZ UDPゴシック" panose="020B0400000000000000" pitchFamily="50" charset="-128"/>
+              </a:rPr>
+              <a:t>ぜひ</a:t>
+            </a:r>
+            <a:r>
+              <a:rPr kumimoji="1" lang="en-US" altLang="ja-JP" sz="3200" dirty="0">
+                <a:latin typeface="BIZ UDPゴシック" panose="020B0400000000000000" pitchFamily="50" charset="-128"/>
+                <a:ea typeface="BIZ UDPゴシック" panose="020B0400000000000000" pitchFamily="50" charset="-128"/>
+              </a:rPr>
+              <a:t>URL</a:t>
+            </a:r>
+            <a:r>
+              <a:rPr kumimoji="1" lang="ja-JP" altLang="en-US" sz="3200" dirty="0">
+                <a:latin typeface="BIZ UDPゴシック" panose="020B0400000000000000" pitchFamily="50" charset="-128"/>
+                <a:ea typeface="BIZ UDPゴシック" panose="020B0400000000000000" pitchFamily="50" charset="-128"/>
+              </a:rPr>
+              <a:t>から遊んでみてください！</a:t>
+            </a:r>
+          </a:p>
+        </p:txBody>
+      </p:sp>
     </p:spTree>
   </p:cSld>
   <p:clrMapOvr>

--- a/0H01002_網干風駕_個人製作.pptx
+++ b/0H01002_網干風駕_個人製作.pptx
@@ -5110,7 +5110,7 @@
         </p:blipFill>
         <p:spPr>
           <a:xfrm>
-            <a:off x="8865832" y="1731948"/>
+            <a:off x="8599669" y="2362884"/>
             <a:ext cx="2991398" cy="551539"/>
           </a:xfrm>
           <a:prstGeom prst="rect">

--- a/0H01002_網干風駕_個人製作.pptx
+++ b/0H01002_網干風駕_個人製作.pptx
@@ -4864,7 +4864,7 @@
         </p:blipFill>
         <p:spPr>
           <a:xfrm>
-            <a:off x="3178326" y="1731948"/>
+            <a:off x="3370350" y="1731948"/>
             <a:ext cx="1238226" cy="1699088"/>
           </a:xfrm>
           <a:prstGeom prst="rect">
@@ -4894,7 +4894,7 @@
         </p:blipFill>
         <p:spPr>
           <a:xfrm>
-            <a:off x="5094878" y="1731948"/>
+            <a:off x="5469782" y="1731948"/>
             <a:ext cx="1726546" cy="1699088"/>
           </a:xfrm>
           <a:prstGeom prst="rect">
@@ -5110,8 +5110,8 @@
         </p:blipFill>
         <p:spPr>
           <a:xfrm>
-            <a:off x="8599669" y="2362884"/>
-            <a:ext cx="2991398" cy="551539"/>
+            <a:off x="8299436" y="2399460"/>
+            <a:ext cx="2878459" cy="530716"/>
           </a:xfrm>
           <a:prstGeom prst="rect">
             <a:avLst/>
